--- a/demo/b3a11b1b86/deck.pptx
+++ b/demo/b3a11b1b86/deck.pptx
@@ -5240,7 +5240,7 @@
               </a:defRPr>
             </a:pPr>
             <a:r>
-              <a:t>•  price: 800 INR (range 600–1000) — evidence [c19]</a:t>
+              <a:t>•  price: 800 INR (range 750–850) — evidence [c19]</a:t>
             </a:r>
           </a:p>
           <a:p>
@@ -5255,7 +5255,7 @@
               </a:defRPr>
             </a:pPr>
             <a:r>
-              <a:t>•  variable cost: 8000 INR (range 4000–15000) — assumption</a:t>
+              <a:t>•  variable cost: 240 INR (range 180–300) — assumption</a:t>
             </a:r>
           </a:p>
           <a:p>
@@ -5270,7 +5270,7 @@
               </a:defRPr>
             </a:pPr>
             <a:r>
-              <a:t>•  cac: 2500 INR (range 1500–4000) — assumption</a:t>
+              <a:t>•  cac: 2000 INR (range 1500–3000) — assumption</a:t>
             </a:r>
           </a:p>
           <a:p>
@@ -5285,7 +5285,7 @@
               </a:defRPr>
             </a:pPr>
             <a:r>
-              <a:t>•  churn: 0.07 INR (range 0.05–0.12) — assumption</a:t>
+              <a:t>•  churn: 0.07 INR (range 0.05–0.1) — assumption</a:t>
             </a:r>
           </a:p>
           <a:p>
@@ -5300,7 +5300,7 @@
               </a:defRPr>
             </a:pPr>
             <a:r>
-              <a:t>•  fixed cost: 200000 INR (range 150000–300000) — assumption</a:t>
+              <a:t>•  fixed cost: 80000 INR (range 60000–120000) — assumption</a:t>
             </a:r>
           </a:p>
           <a:p>
@@ -5315,7 +5315,7 @@
               </a:defRPr>
             </a:pPr>
             <a:r>
-              <a:t>•  Margin -7200 · LTV -102857 · LTV/CAC -41.143 · payback None months</a:t>
+              <a:t>•  Margin 560 · LTV 8000 · LTV/CAC 4.0 · payback 3.571 months</a:t>
             </a:r>
           </a:p>
           <a:p>
@@ -5330,7 +5330,7 @@
               </a:defRPr>
             </a:pPr>
             <a:r>
-              <a:t>•  Monte Carlo (2000 trials): P(margin&gt;0) 0% · P(LTV/CAC&gt;3) 0% · P(payback&lt;12m) 0%</a:t>
+              <a:t>•  Monte Carlo (2000 trials): P(margin&gt;0) 100% · P(LTV/CAC&gt;3) 79% · P(payback&lt;12m) 100%</a:t>
             </a:r>
           </a:p>
         </p:txBody>
